--- a/ゲーム科3年/00_前期/オンラインゲームプログラミングⅠ/00_オンラインゲームの仕組み.pptx
+++ b/ゲーム科3年/00_前期/オンラインゲームプログラミングⅠ/00_オンラインゲームの仕組み.pptx
@@ -264,7 +264,7 @@
           <a:p>
             <a:fld id="{E9CC885B-4903-4D54-9A93-00025F12DED9}" type="datetimeFigureOut">
               <a:rPr kumimoji="1" lang="ja-JP" altLang="en-US" smtClean="0"/>
-              <a:t>2025/8/18</a:t>
+              <a:t>2025/12/12</a:t>
             </a:fld>
             <a:endParaRPr kumimoji="1" lang="ja-JP" altLang="en-US"/>
           </a:p>
@@ -494,7 +494,7 @@
           <a:p>
             <a:fld id="{E9CC885B-4903-4D54-9A93-00025F12DED9}" type="datetimeFigureOut">
               <a:rPr kumimoji="1" lang="ja-JP" altLang="en-US" smtClean="0"/>
-              <a:t>2025/8/18</a:t>
+              <a:t>2025/12/12</a:t>
             </a:fld>
             <a:endParaRPr kumimoji="1" lang="ja-JP" altLang="en-US"/>
           </a:p>
@@ -734,7 +734,7 @@
           <a:p>
             <a:fld id="{E9CC885B-4903-4D54-9A93-00025F12DED9}" type="datetimeFigureOut">
               <a:rPr kumimoji="1" lang="ja-JP" altLang="en-US" smtClean="0"/>
-              <a:t>2025/8/18</a:t>
+              <a:t>2025/12/12</a:t>
             </a:fld>
             <a:endParaRPr kumimoji="1" lang="ja-JP" altLang="en-US"/>
           </a:p>
@@ -964,7 +964,7 @@
           <a:p>
             <a:fld id="{E9CC885B-4903-4D54-9A93-00025F12DED9}" type="datetimeFigureOut">
               <a:rPr kumimoji="1" lang="ja-JP" altLang="en-US" smtClean="0"/>
-              <a:t>2025/8/18</a:t>
+              <a:t>2025/12/12</a:t>
             </a:fld>
             <a:endParaRPr kumimoji="1" lang="ja-JP" altLang="en-US"/>
           </a:p>
@@ -1239,7 +1239,7 @@
           <a:p>
             <a:fld id="{E9CC885B-4903-4D54-9A93-00025F12DED9}" type="datetimeFigureOut">
               <a:rPr kumimoji="1" lang="ja-JP" altLang="en-US" smtClean="0"/>
-              <a:t>2025/8/18</a:t>
+              <a:t>2025/12/12</a:t>
             </a:fld>
             <a:endParaRPr kumimoji="1" lang="ja-JP" altLang="en-US"/>
           </a:p>
@@ -1568,7 +1568,7 @@
           <a:p>
             <a:fld id="{E9CC885B-4903-4D54-9A93-00025F12DED9}" type="datetimeFigureOut">
               <a:rPr kumimoji="1" lang="ja-JP" altLang="en-US" smtClean="0"/>
-              <a:t>2025/8/18</a:t>
+              <a:t>2025/12/12</a:t>
             </a:fld>
             <a:endParaRPr kumimoji="1" lang="ja-JP" altLang="en-US"/>
           </a:p>
@@ -2044,7 +2044,7 @@
           <a:p>
             <a:fld id="{E9CC885B-4903-4D54-9A93-00025F12DED9}" type="datetimeFigureOut">
               <a:rPr kumimoji="1" lang="ja-JP" altLang="en-US" smtClean="0"/>
-              <a:t>2025/8/18</a:t>
+              <a:t>2025/12/12</a:t>
             </a:fld>
             <a:endParaRPr kumimoji="1" lang="ja-JP" altLang="en-US"/>
           </a:p>
@@ -2185,7 +2185,7 @@
           <a:p>
             <a:fld id="{E9CC885B-4903-4D54-9A93-00025F12DED9}" type="datetimeFigureOut">
               <a:rPr kumimoji="1" lang="ja-JP" altLang="en-US" smtClean="0"/>
-              <a:t>2025/8/18</a:t>
+              <a:t>2025/12/12</a:t>
             </a:fld>
             <a:endParaRPr kumimoji="1" lang="ja-JP" altLang="en-US"/>
           </a:p>
@@ -2298,7 +2298,7 @@
           <a:p>
             <a:fld id="{E9CC885B-4903-4D54-9A93-00025F12DED9}" type="datetimeFigureOut">
               <a:rPr kumimoji="1" lang="ja-JP" altLang="en-US" smtClean="0"/>
-              <a:t>2025/8/18</a:t>
+              <a:t>2025/12/12</a:t>
             </a:fld>
             <a:endParaRPr kumimoji="1" lang="ja-JP" altLang="en-US"/>
           </a:p>
@@ -2641,7 +2641,7 @@
           <a:p>
             <a:fld id="{E9CC885B-4903-4D54-9A93-00025F12DED9}" type="datetimeFigureOut">
               <a:rPr kumimoji="1" lang="ja-JP" altLang="en-US" smtClean="0"/>
-              <a:t>2025/8/18</a:t>
+              <a:t>2025/12/12</a:t>
             </a:fld>
             <a:endParaRPr kumimoji="1" lang="ja-JP" altLang="en-US"/>
           </a:p>
@@ -2929,7 +2929,7 @@
           <a:p>
             <a:fld id="{E9CC885B-4903-4D54-9A93-00025F12DED9}" type="datetimeFigureOut">
               <a:rPr kumimoji="1" lang="ja-JP" altLang="en-US" smtClean="0"/>
-              <a:t>2025/8/18</a:t>
+              <a:t>2025/12/12</a:t>
             </a:fld>
             <a:endParaRPr kumimoji="1" lang="ja-JP" altLang="en-US"/>
           </a:p>
@@ -3202,7 +3202,7 @@
           <a:p>
             <a:fld id="{E9CC885B-4903-4D54-9A93-00025F12DED9}" type="datetimeFigureOut">
               <a:rPr kumimoji="1" lang="ja-JP" altLang="en-US" smtClean="0"/>
-              <a:t>2025/8/18</a:t>
+              <a:t>2025/12/12</a:t>
             </a:fld>
             <a:endParaRPr kumimoji="1" lang="ja-JP" altLang="en-US"/>
           </a:p>
@@ -3832,15 +3832,15 @@
         </p:spPr>
         <p:style>
           <a:lnRef idx="2">
-            <a:schemeClr val="accent1">
+            <a:schemeClr val="accent4">
               <a:shade val="50000"/>
             </a:schemeClr>
           </a:lnRef>
           <a:fillRef idx="1">
-            <a:schemeClr val="accent1"/>
+            <a:schemeClr val="accent4"/>
           </a:fillRef>
           <a:effectRef idx="0">
-            <a:schemeClr val="accent1"/>
+            <a:schemeClr val="accent4"/>
           </a:effectRef>
           <a:fontRef idx="minor">
             <a:schemeClr val="lt1"/>
@@ -3873,6 +3873,98 @@
             <a:ext cx="251011" cy="236796"/>
           </a:xfrm>
           <a:prstGeom prst="smileyFace">
+            <a:avLst/>
+          </a:prstGeom>
+        </p:spPr>
+        <p:style>
+          <a:lnRef idx="2">
+            <a:schemeClr val="accent2">
+              <a:shade val="50000"/>
+            </a:schemeClr>
+          </a:lnRef>
+          <a:fillRef idx="1">
+            <a:schemeClr val="accent2"/>
+          </a:fillRef>
+          <a:effectRef idx="0">
+            <a:schemeClr val="accent2"/>
+          </a:effectRef>
+          <a:fontRef idx="minor">
+            <a:schemeClr val="lt1"/>
+          </a:fontRef>
+        </p:style>
+        <p:txBody>
+          <a:bodyPr rtlCol="0" anchor="ctr"/>
+          <a:lstStyle/>
+          <a:p>
+            <a:pPr algn="ctr"/>
+            <a:endParaRPr kumimoji="1" lang="ja-JP" altLang="en-US"/>
+          </a:p>
+        </p:txBody>
+      </p:sp>
+      <p:sp>
+        <p:nvSpPr>
+          <p:cNvPr id="9" name="スマイル 8">
+            <a:extLst>
+              <a:ext uri="{FF2B5EF4-FFF2-40B4-BE49-F238E27FC236}">
+                <a16:creationId xmlns:a16="http://schemas.microsoft.com/office/drawing/2014/main" id="{51144E72-47FF-45A8-B3C9-6BC2D758B77F}"/>
+              </a:ext>
+            </a:extLst>
+          </p:cNvPr>
+          <p:cNvSpPr/>
+          <p:nvPr/>
+        </p:nvSpPr>
+        <p:spPr>
+          <a:xfrm>
+            <a:off x="1674684" y="2960479"/>
+            <a:ext cx="251011" cy="236796"/>
+          </a:xfrm>
+          <a:prstGeom prst="smileyFace">
+            <a:avLst/>
+          </a:prstGeom>
+        </p:spPr>
+        <p:style>
+          <a:lnRef idx="2">
+            <a:schemeClr val="accent6">
+              <a:shade val="50000"/>
+            </a:schemeClr>
+          </a:lnRef>
+          <a:fillRef idx="1">
+            <a:schemeClr val="accent6"/>
+          </a:fillRef>
+          <a:effectRef idx="0">
+            <a:schemeClr val="accent6"/>
+          </a:effectRef>
+          <a:fontRef idx="minor">
+            <a:schemeClr val="lt1"/>
+          </a:fontRef>
+        </p:style>
+        <p:txBody>
+          <a:bodyPr rtlCol="0" anchor="ctr"/>
+          <a:lstStyle/>
+          <a:p>
+            <a:pPr algn="ctr"/>
+            <a:endParaRPr kumimoji="1" lang="ja-JP" altLang="en-US"/>
+          </a:p>
+        </p:txBody>
+      </p:sp>
+      <p:sp>
+        <p:nvSpPr>
+          <p:cNvPr id="10" name="二等辺三角形 9">
+            <a:extLst>
+              <a:ext uri="{FF2B5EF4-FFF2-40B4-BE49-F238E27FC236}">
+                <a16:creationId xmlns:a16="http://schemas.microsoft.com/office/drawing/2014/main" id="{1BAD0D36-F5B0-433A-9E5F-4769EC98B0FB}"/>
+              </a:ext>
+            </a:extLst>
+          </p:cNvPr>
+          <p:cNvSpPr/>
+          <p:nvPr/>
+        </p:nvSpPr>
+        <p:spPr>
+          <a:xfrm>
+            <a:off x="4027920" y="3650152"/>
+            <a:ext cx="699247" cy="555812"/>
+          </a:xfrm>
+          <a:prstGeom prst="triangle">
             <a:avLst/>
           </a:prstGeom>
         </p:spPr>
@@ -3903,10 +3995,10 @@
       </p:sp>
       <p:sp>
         <p:nvSpPr>
-          <p:cNvPr id="9" name="スマイル 8">
-            <a:extLst>
-              <a:ext uri="{FF2B5EF4-FFF2-40B4-BE49-F238E27FC236}">
-                <a16:creationId xmlns:a16="http://schemas.microsoft.com/office/drawing/2014/main" id="{51144E72-47FF-45A8-B3C9-6BC2D758B77F}"/>
+          <p:cNvPr id="11" name="正方形/長方形 10">
+            <a:extLst>
+              <a:ext uri="{FF2B5EF4-FFF2-40B4-BE49-F238E27FC236}">
+                <a16:creationId xmlns:a16="http://schemas.microsoft.com/office/drawing/2014/main" id="{DC9F9770-7653-4FD6-8570-46D5846C8D55}"/>
               </a:ext>
             </a:extLst>
           </p:cNvPr>
@@ -3915,12 +4007,13 @@
         </p:nvSpPr>
         <p:spPr>
           <a:xfrm>
-            <a:off x="1674684" y="2960479"/>
-            <a:ext cx="251011" cy="236796"/>
-          </a:xfrm>
-          <a:prstGeom prst="smileyFace">
+            <a:off x="3507966" y="2556458"/>
+            <a:ext cx="1748118" cy="1093694"/>
+          </a:xfrm>
+          <a:prstGeom prst="rect">
             <a:avLst/>
           </a:prstGeom>
+          <a:noFill/>
         </p:spPr>
         <p:style>
           <a:lnRef idx="2">
@@ -3949,10 +4042,10 @@
       </p:sp>
       <p:sp>
         <p:nvSpPr>
-          <p:cNvPr id="10" name="二等辺三角形 9">
-            <a:extLst>
-              <a:ext uri="{FF2B5EF4-FFF2-40B4-BE49-F238E27FC236}">
-                <a16:creationId xmlns:a16="http://schemas.microsoft.com/office/drawing/2014/main" id="{1BAD0D36-F5B0-433A-9E5F-4769EC98B0FB}"/>
+          <p:cNvPr id="12" name="スマイル 11">
+            <a:extLst>
+              <a:ext uri="{FF2B5EF4-FFF2-40B4-BE49-F238E27FC236}">
+                <a16:creationId xmlns:a16="http://schemas.microsoft.com/office/drawing/2014/main" id="{D970A676-AB9D-4986-A629-3923B04C7C77}"/>
               </a:ext>
             </a:extLst>
           </p:cNvPr>
@@ -3961,7 +4054,145 @@
         </p:nvSpPr>
         <p:spPr>
           <a:xfrm>
-            <a:off x="4027920" y="3650152"/>
+            <a:off x="3884484" y="2748111"/>
+            <a:ext cx="251011" cy="236796"/>
+          </a:xfrm>
+          <a:prstGeom prst="smileyFace">
+            <a:avLst/>
+          </a:prstGeom>
+        </p:spPr>
+        <p:style>
+          <a:lnRef idx="2">
+            <a:schemeClr val="accent4">
+              <a:shade val="50000"/>
+            </a:schemeClr>
+          </a:lnRef>
+          <a:fillRef idx="1">
+            <a:schemeClr val="accent4"/>
+          </a:fillRef>
+          <a:effectRef idx="0">
+            <a:schemeClr val="accent4"/>
+          </a:effectRef>
+          <a:fontRef idx="minor">
+            <a:schemeClr val="lt1"/>
+          </a:fontRef>
+        </p:style>
+        <p:txBody>
+          <a:bodyPr rtlCol="0" anchor="ctr"/>
+          <a:lstStyle/>
+          <a:p>
+            <a:pPr algn="ctr"/>
+            <a:endParaRPr kumimoji="1" lang="ja-JP" altLang="en-US"/>
+          </a:p>
+        </p:txBody>
+      </p:sp>
+      <p:sp>
+        <p:nvSpPr>
+          <p:cNvPr id="13" name="スマイル 12">
+            <a:extLst>
+              <a:ext uri="{FF2B5EF4-FFF2-40B4-BE49-F238E27FC236}">
+                <a16:creationId xmlns:a16="http://schemas.microsoft.com/office/drawing/2014/main" id="{6208B56F-E611-4950-A55C-8F13BB50D93D}"/>
+              </a:ext>
+            </a:extLst>
+          </p:cNvPr>
+          <p:cNvSpPr/>
+          <p:nvPr/>
+        </p:nvSpPr>
+        <p:spPr>
+          <a:xfrm>
+            <a:off x="4126532" y="3268064"/>
+            <a:ext cx="251011" cy="236796"/>
+          </a:xfrm>
+          <a:prstGeom prst="smileyFace">
+            <a:avLst/>
+          </a:prstGeom>
+        </p:spPr>
+        <p:style>
+          <a:lnRef idx="2">
+            <a:schemeClr val="accent2">
+              <a:shade val="50000"/>
+            </a:schemeClr>
+          </a:lnRef>
+          <a:fillRef idx="1">
+            <a:schemeClr val="accent2"/>
+          </a:fillRef>
+          <a:effectRef idx="0">
+            <a:schemeClr val="accent2"/>
+          </a:effectRef>
+          <a:fontRef idx="minor">
+            <a:schemeClr val="lt1"/>
+          </a:fontRef>
+        </p:style>
+        <p:txBody>
+          <a:bodyPr rtlCol="0" anchor="ctr"/>
+          <a:lstStyle/>
+          <a:p>
+            <a:pPr algn="ctr"/>
+            <a:endParaRPr kumimoji="1" lang="ja-JP" altLang="en-US"/>
+          </a:p>
+        </p:txBody>
+      </p:sp>
+      <p:sp>
+        <p:nvSpPr>
+          <p:cNvPr id="14" name="スマイル 13">
+            <a:extLst>
+              <a:ext uri="{FF2B5EF4-FFF2-40B4-BE49-F238E27FC236}">
+                <a16:creationId xmlns:a16="http://schemas.microsoft.com/office/drawing/2014/main" id="{FE0AABD0-3651-4A35-B982-536B857B6F4D}"/>
+              </a:ext>
+            </a:extLst>
+          </p:cNvPr>
+          <p:cNvSpPr/>
+          <p:nvPr/>
+        </p:nvSpPr>
+        <p:spPr>
+          <a:xfrm>
+            <a:off x="4615108" y="2960479"/>
+            <a:ext cx="251011" cy="236796"/>
+          </a:xfrm>
+          <a:prstGeom prst="smileyFace">
+            <a:avLst/>
+          </a:prstGeom>
+        </p:spPr>
+        <p:style>
+          <a:lnRef idx="2">
+            <a:schemeClr val="accent6">
+              <a:shade val="50000"/>
+            </a:schemeClr>
+          </a:lnRef>
+          <a:fillRef idx="1">
+            <a:schemeClr val="accent6"/>
+          </a:fillRef>
+          <a:effectRef idx="0">
+            <a:schemeClr val="accent6"/>
+          </a:effectRef>
+          <a:fontRef idx="minor">
+            <a:schemeClr val="lt1"/>
+          </a:fontRef>
+        </p:style>
+        <p:txBody>
+          <a:bodyPr rtlCol="0" anchor="ctr"/>
+          <a:lstStyle/>
+          <a:p>
+            <a:pPr algn="ctr"/>
+            <a:endParaRPr kumimoji="1" lang="ja-JP" altLang="en-US"/>
+          </a:p>
+        </p:txBody>
+      </p:sp>
+      <p:sp>
+        <p:nvSpPr>
+          <p:cNvPr id="15" name="二等辺三角形 14">
+            <a:extLst>
+              <a:ext uri="{FF2B5EF4-FFF2-40B4-BE49-F238E27FC236}">
+                <a16:creationId xmlns:a16="http://schemas.microsoft.com/office/drawing/2014/main" id="{39EB0B6E-1F8E-49BB-AA9C-BE9E15727840}"/>
+              </a:ext>
+            </a:extLst>
+          </p:cNvPr>
+          <p:cNvSpPr/>
+          <p:nvPr/>
+        </p:nvSpPr>
+        <p:spPr>
+          <a:xfrm>
+            <a:off x="6717331" y="3650152"/>
             <a:ext cx="699247" cy="555812"/>
           </a:xfrm>
           <a:prstGeom prst="triangle">
@@ -3995,10 +4226,10 @@
       </p:sp>
       <p:sp>
         <p:nvSpPr>
-          <p:cNvPr id="11" name="正方形/長方形 10">
-            <a:extLst>
-              <a:ext uri="{FF2B5EF4-FFF2-40B4-BE49-F238E27FC236}">
-                <a16:creationId xmlns:a16="http://schemas.microsoft.com/office/drawing/2014/main" id="{DC9F9770-7653-4FD6-8570-46D5846C8D55}"/>
+          <p:cNvPr id="16" name="正方形/長方形 15">
+            <a:extLst>
+              <a:ext uri="{FF2B5EF4-FFF2-40B4-BE49-F238E27FC236}">
+                <a16:creationId xmlns:a16="http://schemas.microsoft.com/office/drawing/2014/main" id="{C08FADCD-320A-48C4-9598-62877C11F94D}"/>
               </a:ext>
             </a:extLst>
           </p:cNvPr>
@@ -4007,7 +4238,7 @@
         </p:nvSpPr>
         <p:spPr>
           <a:xfrm>
-            <a:off x="3507966" y="2556458"/>
+            <a:off x="6197377" y="2556458"/>
             <a:ext cx="1748118" cy="1093694"/>
           </a:xfrm>
           <a:prstGeom prst="rect">
@@ -4042,10 +4273,10 @@
       </p:sp>
       <p:sp>
         <p:nvSpPr>
-          <p:cNvPr id="12" name="スマイル 11">
-            <a:extLst>
-              <a:ext uri="{FF2B5EF4-FFF2-40B4-BE49-F238E27FC236}">
-                <a16:creationId xmlns:a16="http://schemas.microsoft.com/office/drawing/2014/main" id="{D970A676-AB9D-4986-A629-3923B04C7C77}"/>
+          <p:cNvPr id="17" name="スマイル 16">
+            <a:extLst>
+              <a:ext uri="{FF2B5EF4-FFF2-40B4-BE49-F238E27FC236}">
+                <a16:creationId xmlns:a16="http://schemas.microsoft.com/office/drawing/2014/main" id="{CC4CBB92-08FD-4D74-A54E-8928566F5494}"/>
               </a:ext>
             </a:extLst>
           </p:cNvPr>
@@ -4054,10 +4285,148 @@
         </p:nvSpPr>
         <p:spPr>
           <a:xfrm>
-            <a:off x="3884484" y="2748111"/>
+            <a:off x="6573895" y="2748111"/>
             <a:ext cx="251011" cy="236796"/>
           </a:xfrm>
           <a:prstGeom prst="smileyFace">
+            <a:avLst/>
+          </a:prstGeom>
+        </p:spPr>
+        <p:style>
+          <a:lnRef idx="2">
+            <a:schemeClr val="accent4">
+              <a:shade val="50000"/>
+            </a:schemeClr>
+          </a:lnRef>
+          <a:fillRef idx="1">
+            <a:schemeClr val="accent4"/>
+          </a:fillRef>
+          <a:effectRef idx="0">
+            <a:schemeClr val="accent4"/>
+          </a:effectRef>
+          <a:fontRef idx="minor">
+            <a:schemeClr val="lt1"/>
+          </a:fontRef>
+        </p:style>
+        <p:txBody>
+          <a:bodyPr rtlCol="0" anchor="ctr"/>
+          <a:lstStyle/>
+          <a:p>
+            <a:pPr algn="ctr"/>
+            <a:endParaRPr kumimoji="1" lang="ja-JP" altLang="en-US"/>
+          </a:p>
+        </p:txBody>
+      </p:sp>
+      <p:sp>
+        <p:nvSpPr>
+          <p:cNvPr id="18" name="スマイル 17">
+            <a:extLst>
+              <a:ext uri="{FF2B5EF4-FFF2-40B4-BE49-F238E27FC236}">
+                <a16:creationId xmlns:a16="http://schemas.microsoft.com/office/drawing/2014/main" id="{4115AA0D-8D09-4161-80F0-7964D544C34B}"/>
+              </a:ext>
+            </a:extLst>
+          </p:cNvPr>
+          <p:cNvSpPr/>
+          <p:nvPr/>
+        </p:nvSpPr>
+        <p:spPr>
+          <a:xfrm>
+            <a:off x="6815943" y="3268064"/>
+            <a:ext cx="251011" cy="236796"/>
+          </a:xfrm>
+          <a:prstGeom prst="smileyFace">
+            <a:avLst/>
+          </a:prstGeom>
+        </p:spPr>
+        <p:style>
+          <a:lnRef idx="2">
+            <a:schemeClr val="accent2">
+              <a:shade val="50000"/>
+            </a:schemeClr>
+          </a:lnRef>
+          <a:fillRef idx="1">
+            <a:schemeClr val="accent2"/>
+          </a:fillRef>
+          <a:effectRef idx="0">
+            <a:schemeClr val="accent2"/>
+          </a:effectRef>
+          <a:fontRef idx="minor">
+            <a:schemeClr val="lt1"/>
+          </a:fontRef>
+        </p:style>
+        <p:txBody>
+          <a:bodyPr rtlCol="0" anchor="ctr"/>
+          <a:lstStyle/>
+          <a:p>
+            <a:pPr algn="ctr"/>
+            <a:endParaRPr kumimoji="1" lang="ja-JP" altLang="en-US"/>
+          </a:p>
+        </p:txBody>
+      </p:sp>
+      <p:sp>
+        <p:nvSpPr>
+          <p:cNvPr id="19" name="スマイル 18">
+            <a:extLst>
+              <a:ext uri="{FF2B5EF4-FFF2-40B4-BE49-F238E27FC236}">
+                <a16:creationId xmlns:a16="http://schemas.microsoft.com/office/drawing/2014/main" id="{E8A75013-A948-42DF-8CFE-5F9E483732B8}"/>
+              </a:ext>
+            </a:extLst>
+          </p:cNvPr>
+          <p:cNvSpPr/>
+          <p:nvPr/>
+        </p:nvSpPr>
+        <p:spPr>
+          <a:xfrm>
+            <a:off x="7304519" y="2960479"/>
+            <a:ext cx="251011" cy="236796"/>
+          </a:xfrm>
+          <a:prstGeom prst="smileyFace">
+            <a:avLst/>
+          </a:prstGeom>
+        </p:spPr>
+        <p:style>
+          <a:lnRef idx="2">
+            <a:schemeClr val="accent6">
+              <a:shade val="50000"/>
+            </a:schemeClr>
+          </a:lnRef>
+          <a:fillRef idx="1">
+            <a:schemeClr val="accent6"/>
+          </a:fillRef>
+          <a:effectRef idx="0">
+            <a:schemeClr val="accent6"/>
+          </a:effectRef>
+          <a:fontRef idx="minor">
+            <a:schemeClr val="lt1"/>
+          </a:fontRef>
+        </p:style>
+        <p:txBody>
+          <a:bodyPr rtlCol="0" anchor="ctr"/>
+          <a:lstStyle/>
+          <a:p>
+            <a:pPr algn="ctr"/>
+            <a:endParaRPr kumimoji="1" lang="ja-JP" altLang="en-US"/>
+          </a:p>
+        </p:txBody>
+      </p:sp>
+      <p:sp>
+        <p:nvSpPr>
+          <p:cNvPr id="20" name="二等辺三角形 19">
+            <a:extLst>
+              <a:ext uri="{FF2B5EF4-FFF2-40B4-BE49-F238E27FC236}">
+                <a16:creationId xmlns:a16="http://schemas.microsoft.com/office/drawing/2014/main" id="{E1928687-6FC8-4175-9F39-624400F8F9E4}"/>
+              </a:ext>
+            </a:extLst>
+          </p:cNvPr>
+          <p:cNvSpPr/>
+          <p:nvPr/>
+        </p:nvSpPr>
+        <p:spPr>
+          <a:xfrm>
+            <a:off x="9406742" y="3650152"/>
+            <a:ext cx="699247" cy="555812"/>
+          </a:xfrm>
+          <a:prstGeom prst="triangle">
             <a:avLst/>
           </a:prstGeom>
         </p:spPr>
@@ -4088,10 +4457,10 @@
       </p:sp>
       <p:sp>
         <p:nvSpPr>
-          <p:cNvPr id="13" name="スマイル 12">
-            <a:extLst>
-              <a:ext uri="{FF2B5EF4-FFF2-40B4-BE49-F238E27FC236}">
-                <a16:creationId xmlns:a16="http://schemas.microsoft.com/office/drawing/2014/main" id="{6208B56F-E611-4950-A55C-8F13BB50D93D}"/>
+          <p:cNvPr id="21" name="正方形/長方形 20">
+            <a:extLst>
+              <a:ext uri="{FF2B5EF4-FFF2-40B4-BE49-F238E27FC236}">
+                <a16:creationId xmlns:a16="http://schemas.microsoft.com/office/drawing/2014/main" id="{92904FE0-E7FC-4BF2-9D60-005CF880FA03}"/>
               </a:ext>
             </a:extLst>
           </p:cNvPr>
@@ -4100,12 +4469,13 @@
         </p:nvSpPr>
         <p:spPr>
           <a:xfrm>
-            <a:off x="4126532" y="3268064"/>
-            <a:ext cx="251011" cy="236796"/>
-          </a:xfrm>
-          <a:prstGeom prst="smileyFace">
+            <a:off x="8886788" y="2556458"/>
+            <a:ext cx="1748118" cy="1093694"/>
+          </a:xfrm>
+          <a:prstGeom prst="rect">
             <a:avLst/>
           </a:prstGeom>
+          <a:noFill/>
         </p:spPr>
         <p:style>
           <a:lnRef idx="2">
@@ -4134,10 +4504,10 @@
       </p:sp>
       <p:sp>
         <p:nvSpPr>
-          <p:cNvPr id="14" name="スマイル 13">
-            <a:extLst>
-              <a:ext uri="{FF2B5EF4-FFF2-40B4-BE49-F238E27FC236}">
-                <a16:creationId xmlns:a16="http://schemas.microsoft.com/office/drawing/2014/main" id="{FE0AABD0-3651-4A35-B982-536B857B6F4D}"/>
+          <p:cNvPr id="22" name="スマイル 21">
+            <a:extLst>
+              <a:ext uri="{FF2B5EF4-FFF2-40B4-BE49-F238E27FC236}">
+                <a16:creationId xmlns:a16="http://schemas.microsoft.com/office/drawing/2014/main" id="{C284A038-A4DD-411E-A34D-FBFBBE1AE186}"/>
               </a:ext>
             </a:extLst>
           </p:cNvPr>
@@ -4146,7 +4516,7 @@
         </p:nvSpPr>
         <p:spPr>
           <a:xfrm>
-            <a:off x="4615108" y="2960479"/>
+            <a:off x="9263306" y="2748111"/>
             <a:ext cx="251011" cy="236796"/>
           </a:xfrm>
           <a:prstGeom prst="smileyFace">
@@ -4155,15 +4525,15 @@
         </p:spPr>
         <p:style>
           <a:lnRef idx="2">
-            <a:schemeClr val="accent1">
+            <a:schemeClr val="accent4">
               <a:shade val="50000"/>
             </a:schemeClr>
           </a:lnRef>
           <a:fillRef idx="1">
-            <a:schemeClr val="accent1"/>
+            <a:schemeClr val="accent4"/>
           </a:fillRef>
           <a:effectRef idx="0">
-            <a:schemeClr val="accent1"/>
+            <a:schemeClr val="accent4"/>
           </a:effectRef>
           <a:fontRef idx="minor">
             <a:schemeClr val="lt1"/>
@@ -4180,10 +4550,10 @@
       </p:sp>
       <p:sp>
         <p:nvSpPr>
-          <p:cNvPr id="15" name="二等辺三角形 14">
-            <a:extLst>
-              <a:ext uri="{FF2B5EF4-FFF2-40B4-BE49-F238E27FC236}">
-                <a16:creationId xmlns:a16="http://schemas.microsoft.com/office/drawing/2014/main" id="{39EB0B6E-1F8E-49BB-AA9C-BE9E15727840}"/>
+          <p:cNvPr id="23" name="スマイル 22">
+            <a:extLst>
+              <a:ext uri="{FF2B5EF4-FFF2-40B4-BE49-F238E27FC236}">
+                <a16:creationId xmlns:a16="http://schemas.microsoft.com/office/drawing/2014/main" id="{073F814B-5CE8-442F-9B12-CFE34322D375}"/>
               </a:ext>
             </a:extLst>
           </p:cNvPr>
@@ -4192,24 +4562,24 @@
         </p:nvSpPr>
         <p:spPr>
           <a:xfrm>
-            <a:off x="6717331" y="3650152"/>
-            <a:ext cx="699247" cy="555812"/>
-          </a:xfrm>
-          <a:prstGeom prst="triangle">
+            <a:off x="9505354" y="3268064"/>
+            <a:ext cx="251011" cy="236796"/>
+          </a:xfrm>
+          <a:prstGeom prst="smileyFace">
             <a:avLst/>
           </a:prstGeom>
         </p:spPr>
         <p:style>
           <a:lnRef idx="2">
-            <a:schemeClr val="accent1">
+            <a:schemeClr val="accent2">
               <a:shade val="50000"/>
             </a:schemeClr>
           </a:lnRef>
           <a:fillRef idx="1">
-            <a:schemeClr val="accent1"/>
+            <a:schemeClr val="accent2"/>
           </a:fillRef>
           <a:effectRef idx="0">
-            <a:schemeClr val="accent1"/>
+            <a:schemeClr val="accent2"/>
           </a:effectRef>
           <a:fontRef idx="minor">
             <a:schemeClr val="lt1"/>
@@ -4226,10 +4596,10 @@
       </p:sp>
       <p:sp>
         <p:nvSpPr>
-          <p:cNvPr id="16" name="正方形/長方形 15">
-            <a:extLst>
-              <a:ext uri="{FF2B5EF4-FFF2-40B4-BE49-F238E27FC236}">
-                <a16:creationId xmlns:a16="http://schemas.microsoft.com/office/drawing/2014/main" id="{C08FADCD-320A-48C4-9598-62877C11F94D}"/>
+          <p:cNvPr id="24" name="スマイル 23">
+            <a:extLst>
+              <a:ext uri="{FF2B5EF4-FFF2-40B4-BE49-F238E27FC236}">
+                <a16:creationId xmlns:a16="http://schemas.microsoft.com/office/drawing/2014/main" id="{C74316DE-77C8-498E-B63C-6432DBA8327C}"/>
               </a:ext>
             </a:extLst>
           </p:cNvPr>
@@ -4238,394 +4608,24 @@
         </p:nvSpPr>
         <p:spPr>
           <a:xfrm>
-            <a:off x="6197377" y="2556458"/>
-            <a:ext cx="1748118" cy="1093694"/>
-          </a:xfrm>
-          <a:prstGeom prst="rect">
+            <a:off x="9993930" y="2960479"/>
+            <a:ext cx="251011" cy="236796"/>
+          </a:xfrm>
+          <a:prstGeom prst="smileyFace">
             <a:avLst/>
           </a:prstGeom>
-          <a:noFill/>
         </p:spPr>
         <p:style>
           <a:lnRef idx="2">
-            <a:schemeClr val="accent1">
+            <a:schemeClr val="accent6">
               <a:shade val="50000"/>
             </a:schemeClr>
           </a:lnRef>
           <a:fillRef idx="1">
-            <a:schemeClr val="accent1"/>
+            <a:schemeClr val="accent6"/>
           </a:fillRef>
           <a:effectRef idx="0">
-            <a:schemeClr val="accent1"/>
-          </a:effectRef>
-          <a:fontRef idx="minor">
-            <a:schemeClr val="lt1"/>
-          </a:fontRef>
-        </p:style>
-        <p:txBody>
-          <a:bodyPr rtlCol="0" anchor="ctr"/>
-          <a:lstStyle/>
-          <a:p>
-            <a:pPr algn="ctr"/>
-            <a:endParaRPr kumimoji="1" lang="ja-JP" altLang="en-US"/>
-          </a:p>
-        </p:txBody>
-      </p:sp>
-      <p:sp>
-        <p:nvSpPr>
-          <p:cNvPr id="17" name="スマイル 16">
-            <a:extLst>
-              <a:ext uri="{FF2B5EF4-FFF2-40B4-BE49-F238E27FC236}">
-                <a16:creationId xmlns:a16="http://schemas.microsoft.com/office/drawing/2014/main" id="{CC4CBB92-08FD-4D74-A54E-8928566F5494}"/>
-              </a:ext>
-            </a:extLst>
-          </p:cNvPr>
-          <p:cNvSpPr/>
-          <p:nvPr/>
-        </p:nvSpPr>
-        <p:spPr>
-          <a:xfrm>
-            <a:off x="6573895" y="2748111"/>
-            <a:ext cx="251011" cy="236796"/>
-          </a:xfrm>
-          <a:prstGeom prst="smileyFace">
-            <a:avLst/>
-          </a:prstGeom>
-        </p:spPr>
-        <p:style>
-          <a:lnRef idx="2">
-            <a:schemeClr val="accent1">
-              <a:shade val="50000"/>
-            </a:schemeClr>
-          </a:lnRef>
-          <a:fillRef idx="1">
-            <a:schemeClr val="accent1"/>
-          </a:fillRef>
-          <a:effectRef idx="0">
-            <a:schemeClr val="accent1"/>
-          </a:effectRef>
-          <a:fontRef idx="minor">
-            <a:schemeClr val="lt1"/>
-          </a:fontRef>
-        </p:style>
-        <p:txBody>
-          <a:bodyPr rtlCol="0" anchor="ctr"/>
-          <a:lstStyle/>
-          <a:p>
-            <a:pPr algn="ctr"/>
-            <a:endParaRPr kumimoji="1" lang="ja-JP" altLang="en-US"/>
-          </a:p>
-        </p:txBody>
-      </p:sp>
-      <p:sp>
-        <p:nvSpPr>
-          <p:cNvPr id="18" name="スマイル 17">
-            <a:extLst>
-              <a:ext uri="{FF2B5EF4-FFF2-40B4-BE49-F238E27FC236}">
-                <a16:creationId xmlns:a16="http://schemas.microsoft.com/office/drawing/2014/main" id="{4115AA0D-8D09-4161-80F0-7964D544C34B}"/>
-              </a:ext>
-            </a:extLst>
-          </p:cNvPr>
-          <p:cNvSpPr/>
-          <p:nvPr/>
-        </p:nvSpPr>
-        <p:spPr>
-          <a:xfrm>
-            <a:off x="6815943" y="3268064"/>
-            <a:ext cx="251011" cy="236796"/>
-          </a:xfrm>
-          <a:prstGeom prst="smileyFace">
-            <a:avLst/>
-          </a:prstGeom>
-        </p:spPr>
-        <p:style>
-          <a:lnRef idx="2">
-            <a:schemeClr val="accent1">
-              <a:shade val="50000"/>
-            </a:schemeClr>
-          </a:lnRef>
-          <a:fillRef idx="1">
-            <a:schemeClr val="accent1"/>
-          </a:fillRef>
-          <a:effectRef idx="0">
-            <a:schemeClr val="accent1"/>
-          </a:effectRef>
-          <a:fontRef idx="minor">
-            <a:schemeClr val="lt1"/>
-          </a:fontRef>
-        </p:style>
-        <p:txBody>
-          <a:bodyPr rtlCol="0" anchor="ctr"/>
-          <a:lstStyle/>
-          <a:p>
-            <a:pPr algn="ctr"/>
-            <a:endParaRPr kumimoji="1" lang="ja-JP" altLang="en-US"/>
-          </a:p>
-        </p:txBody>
-      </p:sp>
-      <p:sp>
-        <p:nvSpPr>
-          <p:cNvPr id="19" name="スマイル 18">
-            <a:extLst>
-              <a:ext uri="{FF2B5EF4-FFF2-40B4-BE49-F238E27FC236}">
-                <a16:creationId xmlns:a16="http://schemas.microsoft.com/office/drawing/2014/main" id="{E8A75013-A948-42DF-8CFE-5F9E483732B8}"/>
-              </a:ext>
-            </a:extLst>
-          </p:cNvPr>
-          <p:cNvSpPr/>
-          <p:nvPr/>
-        </p:nvSpPr>
-        <p:spPr>
-          <a:xfrm>
-            <a:off x="7304519" y="2960479"/>
-            <a:ext cx="251011" cy="236796"/>
-          </a:xfrm>
-          <a:prstGeom prst="smileyFace">
-            <a:avLst/>
-          </a:prstGeom>
-        </p:spPr>
-        <p:style>
-          <a:lnRef idx="2">
-            <a:schemeClr val="accent1">
-              <a:shade val="50000"/>
-            </a:schemeClr>
-          </a:lnRef>
-          <a:fillRef idx="1">
-            <a:schemeClr val="accent1"/>
-          </a:fillRef>
-          <a:effectRef idx="0">
-            <a:schemeClr val="accent1"/>
-          </a:effectRef>
-          <a:fontRef idx="minor">
-            <a:schemeClr val="lt1"/>
-          </a:fontRef>
-        </p:style>
-        <p:txBody>
-          <a:bodyPr rtlCol="0" anchor="ctr"/>
-          <a:lstStyle/>
-          <a:p>
-            <a:pPr algn="ctr"/>
-            <a:endParaRPr kumimoji="1" lang="ja-JP" altLang="en-US"/>
-          </a:p>
-        </p:txBody>
-      </p:sp>
-      <p:sp>
-        <p:nvSpPr>
-          <p:cNvPr id="20" name="二等辺三角形 19">
-            <a:extLst>
-              <a:ext uri="{FF2B5EF4-FFF2-40B4-BE49-F238E27FC236}">
-                <a16:creationId xmlns:a16="http://schemas.microsoft.com/office/drawing/2014/main" id="{E1928687-6FC8-4175-9F39-624400F8F9E4}"/>
-              </a:ext>
-            </a:extLst>
-          </p:cNvPr>
-          <p:cNvSpPr/>
-          <p:nvPr/>
-        </p:nvSpPr>
-        <p:spPr>
-          <a:xfrm>
-            <a:off x="9406742" y="3650152"/>
-            <a:ext cx="699247" cy="555812"/>
-          </a:xfrm>
-          <a:prstGeom prst="triangle">
-            <a:avLst/>
-          </a:prstGeom>
-        </p:spPr>
-        <p:style>
-          <a:lnRef idx="2">
-            <a:schemeClr val="accent1">
-              <a:shade val="50000"/>
-            </a:schemeClr>
-          </a:lnRef>
-          <a:fillRef idx="1">
-            <a:schemeClr val="accent1"/>
-          </a:fillRef>
-          <a:effectRef idx="0">
-            <a:schemeClr val="accent1"/>
-          </a:effectRef>
-          <a:fontRef idx="minor">
-            <a:schemeClr val="lt1"/>
-          </a:fontRef>
-        </p:style>
-        <p:txBody>
-          <a:bodyPr rtlCol="0" anchor="ctr"/>
-          <a:lstStyle/>
-          <a:p>
-            <a:pPr algn="ctr"/>
-            <a:endParaRPr kumimoji="1" lang="ja-JP" altLang="en-US"/>
-          </a:p>
-        </p:txBody>
-      </p:sp>
-      <p:sp>
-        <p:nvSpPr>
-          <p:cNvPr id="21" name="正方形/長方形 20">
-            <a:extLst>
-              <a:ext uri="{FF2B5EF4-FFF2-40B4-BE49-F238E27FC236}">
-                <a16:creationId xmlns:a16="http://schemas.microsoft.com/office/drawing/2014/main" id="{92904FE0-E7FC-4BF2-9D60-005CF880FA03}"/>
-              </a:ext>
-            </a:extLst>
-          </p:cNvPr>
-          <p:cNvSpPr/>
-          <p:nvPr/>
-        </p:nvSpPr>
-        <p:spPr>
-          <a:xfrm>
-            <a:off x="8886788" y="2556458"/>
-            <a:ext cx="1748118" cy="1093694"/>
-          </a:xfrm>
-          <a:prstGeom prst="rect">
-            <a:avLst/>
-          </a:prstGeom>
-          <a:noFill/>
-        </p:spPr>
-        <p:style>
-          <a:lnRef idx="2">
-            <a:schemeClr val="accent1">
-              <a:shade val="50000"/>
-            </a:schemeClr>
-          </a:lnRef>
-          <a:fillRef idx="1">
-            <a:schemeClr val="accent1"/>
-          </a:fillRef>
-          <a:effectRef idx="0">
-            <a:schemeClr val="accent1"/>
-          </a:effectRef>
-          <a:fontRef idx="minor">
-            <a:schemeClr val="lt1"/>
-          </a:fontRef>
-        </p:style>
-        <p:txBody>
-          <a:bodyPr rtlCol="0" anchor="ctr"/>
-          <a:lstStyle/>
-          <a:p>
-            <a:pPr algn="ctr"/>
-            <a:endParaRPr kumimoji="1" lang="ja-JP" altLang="en-US"/>
-          </a:p>
-        </p:txBody>
-      </p:sp>
-      <p:sp>
-        <p:nvSpPr>
-          <p:cNvPr id="22" name="スマイル 21">
-            <a:extLst>
-              <a:ext uri="{FF2B5EF4-FFF2-40B4-BE49-F238E27FC236}">
-                <a16:creationId xmlns:a16="http://schemas.microsoft.com/office/drawing/2014/main" id="{C284A038-A4DD-411E-A34D-FBFBBE1AE186}"/>
-              </a:ext>
-            </a:extLst>
-          </p:cNvPr>
-          <p:cNvSpPr/>
-          <p:nvPr/>
-        </p:nvSpPr>
-        <p:spPr>
-          <a:xfrm>
-            <a:off x="9263306" y="2748111"/>
-            <a:ext cx="251011" cy="236796"/>
-          </a:xfrm>
-          <a:prstGeom prst="smileyFace">
-            <a:avLst/>
-          </a:prstGeom>
-        </p:spPr>
-        <p:style>
-          <a:lnRef idx="2">
-            <a:schemeClr val="accent1">
-              <a:shade val="50000"/>
-            </a:schemeClr>
-          </a:lnRef>
-          <a:fillRef idx="1">
-            <a:schemeClr val="accent1"/>
-          </a:fillRef>
-          <a:effectRef idx="0">
-            <a:schemeClr val="accent1"/>
-          </a:effectRef>
-          <a:fontRef idx="minor">
-            <a:schemeClr val="lt1"/>
-          </a:fontRef>
-        </p:style>
-        <p:txBody>
-          <a:bodyPr rtlCol="0" anchor="ctr"/>
-          <a:lstStyle/>
-          <a:p>
-            <a:pPr algn="ctr"/>
-            <a:endParaRPr kumimoji="1" lang="ja-JP" altLang="en-US"/>
-          </a:p>
-        </p:txBody>
-      </p:sp>
-      <p:sp>
-        <p:nvSpPr>
-          <p:cNvPr id="23" name="スマイル 22">
-            <a:extLst>
-              <a:ext uri="{FF2B5EF4-FFF2-40B4-BE49-F238E27FC236}">
-                <a16:creationId xmlns:a16="http://schemas.microsoft.com/office/drawing/2014/main" id="{073F814B-5CE8-442F-9B12-CFE34322D375}"/>
-              </a:ext>
-            </a:extLst>
-          </p:cNvPr>
-          <p:cNvSpPr/>
-          <p:nvPr/>
-        </p:nvSpPr>
-        <p:spPr>
-          <a:xfrm>
-            <a:off x="9505354" y="3268064"/>
-            <a:ext cx="251011" cy="236796"/>
-          </a:xfrm>
-          <a:prstGeom prst="smileyFace">
-            <a:avLst/>
-          </a:prstGeom>
-        </p:spPr>
-        <p:style>
-          <a:lnRef idx="2">
-            <a:schemeClr val="accent1">
-              <a:shade val="50000"/>
-            </a:schemeClr>
-          </a:lnRef>
-          <a:fillRef idx="1">
-            <a:schemeClr val="accent1"/>
-          </a:fillRef>
-          <a:effectRef idx="0">
-            <a:schemeClr val="accent1"/>
-          </a:effectRef>
-          <a:fontRef idx="minor">
-            <a:schemeClr val="lt1"/>
-          </a:fontRef>
-        </p:style>
-        <p:txBody>
-          <a:bodyPr rtlCol="0" anchor="ctr"/>
-          <a:lstStyle/>
-          <a:p>
-            <a:pPr algn="ctr"/>
-            <a:endParaRPr kumimoji="1" lang="ja-JP" altLang="en-US"/>
-          </a:p>
-        </p:txBody>
-      </p:sp>
-      <p:sp>
-        <p:nvSpPr>
-          <p:cNvPr id="24" name="スマイル 23">
-            <a:extLst>
-              <a:ext uri="{FF2B5EF4-FFF2-40B4-BE49-F238E27FC236}">
-                <a16:creationId xmlns:a16="http://schemas.microsoft.com/office/drawing/2014/main" id="{C74316DE-77C8-498E-B63C-6432DBA8327C}"/>
-              </a:ext>
-            </a:extLst>
-          </p:cNvPr>
-          <p:cNvSpPr/>
-          <p:nvPr/>
-        </p:nvSpPr>
-        <p:spPr>
-          <a:xfrm>
-            <a:off x="9993930" y="2960479"/>
-            <a:ext cx="251011" cy="236796"/>
-          </a:xfrm>
-          <a:prstGeom prst="smileyFace">
-            <a:avLst/>
-          </a:prstGeom>
-        </p:spPr>
-        <p:style>
-          <a:lnRef idx="2">
-            <a:schemeClr val="accent1">
-              <a:shade val="50000"/>
-            </a:schemeClr>
-          </a:lnRef>
-          <a:fillRef idx="1">
-            <a:schemeClr val="accent1"/>
-          </a:fillRef>
-          <a:effectRef idx="0">
-            <a:schemeClr val="accent1"/>
+            <a:schemeClr val="accent6"/>
           </a:effectRef>
           <a:fontRef idx="minor">
             <a:schemeClr val="lt1"/>
